--- a/presentation/Jeen-Policy-Agent.pptx
+++ b/presentation/Jeen-Policy-Agent.pptx
@@ -2,17 +2,17 @@
 <file path=ppt/presentation.xml><?xml version="1.0" encoding="utf-8"?>
 <p:presentation xmlns:p="http://schemas.openxmlformats.org/presentationml/2006/main">
   <p:sldMasterIdLst>
-    <p:sldMasterId xmlns:r="http://schemas.openxmlformats.org/officeDocument/2006/relationships" id="2147483648" r:id="Ref59a0006747465c"/>
+    <p:sldMasterId xmlns:r="http://schemas.openxmlformats.org/officeDocument/2006/relationships" id="2147483648" r:id="R2e33d7ed1dd44e87"/>
   </p:sldMasterIdLst>
   <p:notesMasterIdLst>
-    <p:notesMasterId xmlns:r="http://schemas.openxmlformats.org/officeDocument/2006/relationships" r:id="Rc591b5e21d754b45"/>
+    <p:notesMasterId xmlns:r="http://schemas.openxmlformats.org/officeDocument/2006/relationships" r:id="R368ee1d340d749ab"/>
   </p:notesMasterIdLst>
   <p:sldIdLst>
-    <p:sldId xmlns:r="http://schemas.openxmlformats.org/officeDocument/2006/relationships" id="256" r:id="R67fee3f428854841"/>
-    <p:sldId xmlns:r="http://schemas.openxmlformats.org/officeDocument/2006/relationships" id="257" r:id="R5e41cec0975340f3"/>
-    <p:sldId xmlns:r="http://schemas.openxmlformats.org/officeDocument/2006/relationships" id="258" r:id="R9bc482ad9ee946ee"/>
-    <p:sldId xmlns:r="http://schemas.openxmlformats.org/officeDocument/2006/relationships" id="259" r:id="Ra9b2ead28e5e4850"/>
-    <p:sldId xmlns:r="http://schemas.openxmlformats.org/officeDocument/2006/relationships" id="260" r:id="R3738a3ae7e8246ee"/>
+    <p:sldId xmlns:r="http://schemas.openxmlformats.org/officeDocument/2006/relationships" id="256" r:id="Rae3c9deb2f524950"/>
+    <p:sldId xmlns:r="http://schemas.openxmlformats.org/officeDocument/2006/relationships" id="257" r:id="Ra62f8a7673ba48ec"/>
+    <p:sldId xmlns:r="http://schemas.openxmlformats.org/officeDocument/2006/relationships" id="258" r:id="R4229ac9707db4082"/>
+    <p:sldId xmlns:r="http://schemas.openxmlformats.org/officeDocument/2006/relationships" id="259" r:id="R9bf0c03bb62145a6"/>
+    <p:sldId xmlns:r="http://schemas.openxmlformats.org/officeDocument/2006/relationships" id="260" r:id="R9533d5beabbd4bb6"/>
   </p:sldIdLst>
   <p:sldSz cx="12192000" cy="6858000"/>
   <p:notesSz cx="6858000" cy="9144000"/>
@@ -407,7 +407,7 @@
 </file>
 
 <file path=ppt/notesSlides/notesSlide1.xml><?xml version="1.0" encoding="utf-8"?>
-<p:notes xmlns:p="http://schemas.openxmlformats.org/presentationml/2006/main">
+<p:notes xmlns:a="http://schemas.openxmlformats.org/drawingml/2006/main" xmlns:p="http://schemas.openxmlformats.org/presentationml/2006/main">
   <p:cSld>
     <p:spTree>
       <p:nvGrpSpPr>
@@ -416,13 +416,13 @@
         <p:nvPr/>
       </p:nvGrpSpPr>
       <p:grpSpPr>
-        <a:xfrm xmlns:a="http://schemas.openxmlformats.org/drawingml/2006/main"/>
+        <a:xfrm/>
       </p:grpSpPr>
       <p:sp>
         <p:nvSpPr>
           <p:cNvPr id="2" name="Slide Image Placeholder 1"/>
           <p:cNvSpPr>
-            <a:spLocks xmlns:a="http://schemas.openxmlformats.org/drawingml/2006/main" noGrp="1"/>
+            <a:spLocks noGrp="1"/>
           </p:cNvSpPr>
           <p:nvPr>
             <p:ph type="sldImg" idx="0"/>
@@ -434,7 +434,7 @@
         <p:nvSpPr>
           <p:cNvPr id="3" name="Notes Placeholder 2"/>
           <p:cNvSpPr>
-            <a:spLocks xmlns:a="http://schemas.openxmlformats.org/drawingml/2006/main" noGrp="1"/>
+            <a:spLocks noGrp="1"/>
           </p:cNvSpPr>
           <p:nvPr>
             <p:ph type="body" idx="1"/>
@@ -442,11 +442,11 @@
         </p:nvSpPr>
         <p:spPr/>
         <p:txBody>
-          <a:bodyPr xmlns:a="http://schemas.openxmlformats.org/drawingml/2006/main"/>
-          <a:lstStyle xmlns:a="http://schemas.openxmlformats.org/drawingml/2006/main"/>
-          <a:p xmlns:a="http://schemas.openxmlformats.org/drawingml/2006/main">
-            <a:r>
-              <a:t>Customer and policies are synthetic and explicitly labeled. Present this as a discovery hypothesis, not a real customer engagement. Target user: operations analyst; reviewer: policy triage lead; sponsor: operations or risk leader. Sources: supplied Jeen home assignment and documents/01_ai_use_policy.md, 02_vendor_intake_policy.md, 03_review_procedure.md.</a:t>
+          <a:bodyPr/>
+          <a:lstStyle/>
+          <a:p>
+            <a:r>
+              <a:t>Cedarbridge Bank is a fictional customer. The target user is an operations analyst, with a policy triage lead reviewing recommendations. The example policies cover AI use, vendor intake and review procedure. Sources: documents/01_ai_use_policy.md, documents/02_vendor_intake_policy.md and documents/03_review_procedure.md.</a:t>
             </a:r>
           </a:p>
         </p:txBody>
@@ -455,7 +455,7 @@
         <p:nvSpPr>
           <p:cNvPr id="4" name="Slide Number Placeholder 3"/>
           <p:cNvSpPr>
-            <a:spLocks xmlns:a="http://schemas.openxmlformats.org/drawingml/2006/main" noGrp="1"/>
+            <a:spLocks noGrp="1"/>
           </p:cNvSpPr>
           <p:nvPr>
             <p:ph type="sldNum" idx="5"/>
@@ -463,21 +463,21 @@
         </p:nvSpPr>
         <p:spPr/>
         <p:txBody>
-          <a:bodyPr xmlns:a="http://schemas.openxmlformats.org/drawingml/2006/main"/>
-          <a:lstStyle xmlns:a="http://schemas.openxmlformats.org/drawingml/2006/main"/>
-          <a:p xmlns:a="http://schemas.openxmlformats.org/drawingml/2006/main"/>
+          <a:bodyPr/>
+          <a:lstStyle/>
+          <a:p/>
         </p:txBody>
       </p:sp>
     </p:spTree>
   </p:cSld>
   <p:clrMapOvr>
-    <a:masterClrMapping xmlns:a="http://schemas.openxmlformats.org/drawingml/2006/main"/>
+    <a:masterClrMapping/>
   </p:clrMapOvr>
 </p:notes>
 </file>
 
 <file path=ppt/notesSlides/notesSlide2.xml><?xml version="1.0" encoding="utf-8"?>
-<p:notes xmlns:p="http://schemas.openxmlformats.org/presentationml/2006/main">
+<p:notes xmlns:a="http://schemas.openxmlformats.org/drawingml/2006/main" xmlns:p="http://schemas.openxmlformats.org/presentationml/2006/main">
   <p:cSld>
     <p:spTree>
       <p:nvGrpSpPr>
@@ -486,13 +486,13 @@
         <p:nvPr/>
       </p:nvGrpSpPr>
       <p:grpSpPr>
-        <a:xfrm xmlns:a="http://schemas.openxmlformats.org/drawingml/2006/main"/>
+        <a:xfrm/>
       </p:grpSpPr>
       <p:sp>
         <p:nvSpPr>
           <p:cNvPr id="2" name="Slide Image Placeholder 1"/>
           <p:cNvSpPr>
-            <a:spLocks xmlns:a="http://schemas.openxmlformats.org/drawingml/2006/main" noGrp="1"/>
+            <a:spLocks noGrp="1"/>
           </p:cNvSpPr>
           <p:nvPr>
             <p:ph type="sldImg" idx="0"/>
@@ -504,7 +504,7 @@
         <p:nvSpPr>
           <p:cNvPr id="3" name="Notes Placeholder 2"/>
           <p:cNvSpPr>
-            <a:spLocks xmlns:a="http://schemas.openxmlformats.org/drawingml/2006/main" noGrp="1"/>
+            <a:spLocks noGrp="1"/>
           </p:cNvSpPr>
           <p:nvPr>
             <p:ph type="body" idx="1"/>
@@ -512,11 +512,11 @@
         </p:nvSpPr>
         <p:spPr/>
         <p:txBody>
-          <a:bodyPr xmlns:a="http://schemas.openxmlformats.org/drawingml/2006/main"/>
-          <a:lstStyle xmlns:a="http://schemas.openxmlformats.org/drawingml/2006/main"/>
-          <a:p xmlns:a="http://schemas.openxmlformats.org/drawingml/2006/main">
-            <a:r>
-              <a:t>These are proposed benefits, not measured savings. Establish a manual baseline on 20 representative questions and compare assisted median handling time, evidence relevance, queue accuracy, abstention quality, and reviewer overrides. Include ambiguous and unsupported questions. Treat zero unapproved case creation as an acceptance gate. Do not quote invented ROI. Discovery: what queues exist, who owns policy versions, what minimum evidence is sufficient, who may approve?</a:t>
+          <a:bodyPr/>
+          <a:lstStyle/>
+          <a:p>
+            <a:r>
+              <a:t>The proposed pilot would compare manual and assisted handling time on representative policy questions, alongside evidence relevance, queue accuracy and reviewer overrides. These are proposed measures; customer savings have not been measured. Policy ownership, approval roles and authoritative document versions would be agreed before a pilot.</a:t>
             </a:r>
           </a:p>
         </p:txBody>
@@ -525,7 +525,7 @@
         <p:nvSpPr>
           <p:cNvPr id="4" name="Slide Number Placeholder 3"/>
           <p:cNvSpPr>
-            <a:spLocks xmlns:a="http://schemas.openxmlformats.org/drawingml/2006/main" noGrp="1"/>
+            <a:spLocks noGrp="1"/>
           </p:cNvSpPr>
           <p:nvPr>
             <p:ph type="sldNum" idx="5"/>
@@ -533,21 +533,21 @@
         </p:nvSpPr>
         <p:spPr/>
         <p:txBody>
-          <a:bodyPr xmlns:a="http://schemas.openxmlformats.org/drawingml/2006/main"/>
-          <a:lstStyle xmlns:a="http://schemas.openxmlformats.org/drawingml/2006/main"/>
-          <a:p xmlns:a="http://schemas.openxmlformats.org/drawingml/2006/main"/>
+          <a:bodyPr/>
+          <a:lstStyle/>
+          <a:p/>
         </p:txBody>
       </p:sp>
     </p:spTree>
   </p:cSld>
   <p:clrMapOvr>
-    <a:masterClrMapping xmlns:a="http://schemas.openxmlformats.org/drawingml/2006/main"/>
+    <a:masterClrMapping/>
   </p:clrMapOvr>
 </p:notes>
 </file>
 
 <file path=ppt/notesSlides/notesSlide3.xml><?xml version="1.0" encoding="utf-8"?>
-<p:notes xmlns:p="http://schemas.openxmlformats.org/presentationml/2006/main">
+<p:notes xmlns:a="http://schemas.openxmlformats.org/drawingml/2006/main" xmlns:p="http://schemas.openxmlformats.org/presentationml/2006/main">
   <p:cSld>
     <p:spTree>
       <p:nvGrpSpPr>
@@ -556,13 +556,13 @@
         <p:nvPr/>
       </p:nvGrpSpPr>
       <p:grpSpPr>
-        <a:xfrm xmlns:a="http://schemas.openxmlformats.org/drawingml/2006/main"/>
+        <a:xfrm/>
       </p:grpSpPr>
       <p:sp>
         <p:nvSpPr>
           <p:cNvPr id="2" name="Slide Image Placeholder 1"/>
           <p:cNvSpPr>
-            <a:spLocks xmlns:a="http://schemas.openxmlformats.org/drawingml/2006/main" noGrp="1"/>
+            <a:spLocks noGrp="1"/>
           </p:cNvSpPr>
           <p:nvPr>
             <p:ph type="sldImg" idx="0"/>
@@ -574,7 +574,7 @@
         <p:nvSpPr>
           <p:cNvPr id="3" name="Notes Placeholder 2"/>
           <p:cNvSpPr>
-            <a:spLocks xmlns:a="http://schemas.openxmlformats.org/drawingml/2006/main" noGrp="1"/>
+            <a:spLocks noGrp="1"/>
           </p:cNvSpPr>
           <p:nvPr>
             <p:ph type="body" idx="1"/>
@@ -582,11 +582,11 @@
         </p:nvSpPr>
         <p:spPr/>
         <p:txBody>
-          <a:bodyPr xmlns:a="http://schemas.openxmlformats.org/drawingml/2006/main"/>
-          <a:lstStyle xmlns:a="http://schemas.openxmlformats.org/drawingml/2006/main"/>
-          <a:p xmlns:a="http://schemas.openxmlformats.org/drawingml/2006/main">
-            <a:r>
-              <a:t>Platform: n8n. Python standard-library integration has /retrieve, /propose, /decisions, /cases and /audit endpoints. RAG uses heading-based chunks, BM25 top-4 retrieval, LLM selection of 1–3 evidence IDs, metadata checks, and deterministic rendering of original excerpts. The LLM is not a free-text policy author. Explain why lexical search is appropriate for this small, exact-policy corpus and when hybrid retrieval would be needed. n8n Form documentation: https://docs.n8n.io/integrations/builtin/core-nodes/n8n-nodes-base.form/ .</a:t>
+          <a:bodyPr/>
+          <a:lstStyle/>
+          <a:p>
+            <a:r>
+              <a:t>n8n handles the request and review forms. The Python API exposes /retrieve, /propose, /decisions, /cases and /audit. Retrieval uses heading-based chunks and BM25 top-4 ranking. The model selects one to three evidence IDs and a queue. The API validates those selections and renders the original excerpts. BM25 is a simple fit for the small policy corpus; broader vocabulary and a larger collection would require additional retrieval evaluation.</a:t>
             </a:r>
           </a:p>
         </p:txBody>
@@ -595,7 +595,7 @@
         <p:nvSpPr>
           <p:cNvPr id="4" name="Slide Number Placeholder 3"/>
           <p:cNvSpPr>
-            <a:spLocks xmlns:a="http://schemas.openxmlformats.org/drawingml/2006/main" noGrp="1"/>
+            <a:spLocks noGrp="1"/>
           </p:cNvSpPr>
           <p:nvPr>
             <p:ph type="sldNum" idx="5"/>
@@ -603,21 +603,21 @@
         </p:nvSpPr>
         <p:spPr/>
         <p:txBody>
-          <a:bodyPr xmlns:a="http://schemas.openxmlformats.org/drawingml/2006/main"/>
-          <a:lstStyle xmlns:a="http://schemas.openxmlformats.org/drawingml/2006/main"/>
-          <a:p xmlns:a="http://schemas.openxmlformats.org/drawingml/2006/main"/>
+          <a:bodyPr/>
+          <a:lstStyle/>
+          <a:p/>
         </p:txBody>
       </p:sp>
     </p:spTree>
   </p:cSld>
   <p:clrMapOvr>
-    <a:masterClrMapping xmlns:a="http://schemas.openxmlformats.org/drawingml/2006/main"/>
+    <a:masterClrMapping/>
   </p:clrMapOvr>
 </p:notes>
 </file>
 
 <file path=ppt/notesSlides/notesSlide4.xml><?xml version="1.0" encoding="utf-8"?>
-<p:notes xmlns:p="http://schemas.openxmlformats.org/presentationml/2006/main">
+<p:notes xmlns:a="http://schemas.openxmlformats.org/drawingml/2006/main" xmlns:p="http://schemas.openxmlformats.org/presentationml/2006/main">
   <p:cSld>
     <p:spTree>
       <p:nvGrpSpPr>
@@ -626,13 +626,13 @@
         <p:nvPr/>
       </p:nvGrpSpPr>
       <p:grpSpPr>
-        <a:xfrm xmlns:a="http://schemas.openxmlformats.org/drawingml/2006/main"/>
+        <a:xfrm/>
       </p:grpSpPr>
       <p:sp>
         <p:nvSpPr>
           <p:cNvPr id="2" name="Slide Image Placeholder 1"/>
           <p:cNvSpPr>
-            <a:spLocks xmlns:a="http://schemas.openxmlformats.org/drawingml/2006/main" noGrp="1"/>
+            <a:spLocks noGrp="1"/>
           </p:cNvSpPr>
           <p:nvPr>
             <p:ph type="sldImg" idx="0"/>
@@ -644,7 +644,7 @@
         <p:nvSpPr>
           <p:cNvPr id="3" name="Notes Placeholder 2"/>
           <p:cNvSpPr>
-            <a:spLocks xmlns:a="http://schemas.openxmlformats.org/drawingml/2006/main" noGrp="1"/>
+            <a:spLocks noGrp="1"/>
           </p:cNvSpPr>
           <p:nvPr>
             <p:ph type="body" idx="1"/>
@@ -652,11 +652,11 @@
         </p:nvSpPr>
         <p:spPr/>
         <p:txBody>
-          <a:bodyPr xmlns:a="http://schemas.openxmlformats.org/drawingml/2006/main"/>
-          <a:lstStyle xmlns:a="http://schemas.openxmlformats.org/drawingml/2006/main"/>
-          <a:p xmlns:a="http://schemas.openxmlformats.org/drawingml/2006/main">
-            <a:r>
-              <a:t>Do not claim zero hallucinations or production compliance. Exact excerpts stop the model inventing policy prose, but evidence selection and routing remain fallible. Semantic entailment and malicious instructions are evaluated through adversarial questions and human review. Synthetic documents only. SQLite audit entries are not tamper-proof. The same browser performs requester and reviewer roles for the demo; separation of duties is not enforced. No Kubernetes, Terraform, private cloud, or air-gapped implementation is included.</a:t>
+          <a:bodyPr/>
+          <a:lstStyle/>
+          <a:p>
+            <a:r>
+              <a:t>The model can select a real but irrelevant citation. Source-ID and queue checks establish provenance, while the reviewer assesses relevance. The demo records a self-declared reviewer name and does not enforce separation of duties. SQLite audit records persist but are mutable. Production would require authenticated reviewers, document access controls and protected audit storage. Approval creates a review case without granting a policy exception.</a:t>
             </a:r>
           </a:p>
         </p:txBody>
@@ -665,7 +665,7 @@
         <p:nvSpPr>
           <p:cNvPr id="4" name="Slide Number Placeholder 3"/>
           <p:cNvSpPr>
-            <a:spLocks xmlns:a="http://schemas.openxmlformats.org/drawingml/2006/main" noGrp="1"/>
+            <a:spLocks noGrp="1"/>
           </p:cNvSpPr>
           <p:nvPr>
             <p:ph type="sldNum" idx="5"/>
@@ -673,21 +673,21 @@
         </p:nvSpPr>
         <p:spPr/>
         <p:txBody>
-          <a:bodyPr xmlns:a="http://schemas.openxmlformats.org/drawingml/2006/main"/>
-          <a:lstStyle xmlns:a="http://schemas.openxmlformats.org/drawingml/2006/main"/>
-          <a:p xmlns:a="http://schemas.openxmlformats.org/drawingml/2006/main"/>
+          <a:bodyPr/>
+          <a:lstStyle/>
+          <a:p/>
         </p:txBody>
       </p:sp>
     </p:spTree>
   </p:cSld>
   <p:clrMapOvr>
-    <a:masterClrMapping xmlns:a="http://schemas.openxmlformats.org/drawingml/2006/main"/>
+    <a:masterClrMapping/>
   </p:clrMapOvr>
 </p:notes>
 </file>
 
 <file path=ppt/notesSlides/notesSlide5.xml><?xml version="1.0" encoding="utf-8"?>
-<p:notes xmlns:p="http://schemas.openxmlformats.org/presentationml/2006/main">
+<p:notes xmlns:a="http://schemas.openxmlformats.org/drawingml/2006/main" xmlns:p="http://schemas.openxmlformats.org/presentationml/2006/main">
   <p:cSld>
     <p:spTree>
       <p:nvGrpSpPr>
@@ -696,13 +696,13 @@
         <p:nvPr/>
       </p:nvGrpSpPr>
       <p:grpSpPr>
-        <a:xfrm xmlns:a="http://schemas.openxmlformats.org/drawingml/2006/main"/>
+        <a:xfrm/>
       </p:grpSpPr>
       <p:sp>
         <p:nvSpPr>
           <p:cNvPr id="2" name="Slide Image Placeholder 1"/>
           <p:cNvSpPr>
-            <a:spLocks xmlns:a="http://schemas.openxmlformats.org/drawingml/2006/main" noGrp="1"/>
+            <a:spLocks noGrp="1"/>
           </p:cNvSpPr>
           <p:nvPr>
             <p:ph type="sldImg" idx="0"/>
@@ -714,7 +714,7 @@
         <p:nvSpPr>
           <p:cNvPr id="3" name="Notes Placeholder 2"/>
           <p:cNvSpPr>
-            <a:spLocks xmlns:a="http://schemas.openxmlformats.org/drawingml/2006/main" noGrp="1"/>
+            <a:spLocks noGrp="1"/>
           </p:cNvSpPr>
           <p:nvPr>
             <p:ph type="body" idx="1"/>
@@ -722,11 +722,11 @@
         </p:nvSpPr>
         <p:spPr/>
         <p:txBody>
-          <a:bodyPr xmlns:a="http://schemas.openxmlformats.org/drawingml/2006/main"/>
-          <a:lstStyle xmlns:a="http://schemas.openxmlformats.org/drawingml/2006/main"/>
-          <a:p xmlns:a="http://schemas.openxmlformats.org/drawingml/2006/main">
-            <a:r>
-              <a:t>Be transparent: the supplied automated tests inject model fixtures and do not establish live LLM accuracy. Before presenting, run all questions in docs/evaluation_cases.json, capture a full workflow screenshot plus successful approval and case screenshots, and update this slide with actual results. Run the reject path too. Have a local screen recording as backup. The assignment permits up to 5 slides and expects a 4–5 hour scope; this deck has exactly 5.</a:t>
+          <a:bodyPr/>
+          <a:lstStyle/>
+          <a:p>
+            <a:r>
+              <a:t>Application results: evidence/automated-tests.txt, 27/27 tests recorded September 11, including Windows CRLF source handling and changed-file blocking. These tests use fixed model responses. Live results: evidence/live-evaluation.json, 10/10 checks recorded September 10 with OpenAI gpt-5.6-sol, covering four supported scenarios and six abstentions. The live runner evaluates evidence selection and routing; it does not create cases. Separate n8n screenshots show case creation after approval, rejection without a case, and insufficient evidence blocked on approval. The live results predate the hashing correction. The small evaluation set does not establish general accuracy.</a:t>
             </a:r>
           </a:p>
         </p:txBody>
@@ -735,7 +735,7 @@
         <p:nvSpPr>
           <p:cNvPr id="4" name="Slide Number Placeholder 3"/>
           <p:cNvSpPr>
-            <a:spLocks xmlns:a="http://schemas.openxmlformats.org/drawingml/2006/main" noGrp="1"/>
+            <a:spLocks noGrp="1"/>
           </p:cNvSpPr>
           <p:nvPr>
             <p:ph type="sldNum" idx="5"/>
@@ -743,15 +743,15 @@
         </p:nvSpPr>
         <p:spPr/>
         <p:txBody>
-          <a:bodyPr xmlns:a="http://schemas.openxmlformats.org/drawingml/2006/main"/>
-          <a:lstStyle xmlns:a="http://schemas.openxmlformats.org/drawingml/2006/main"/>
-          <a:p xmlns:a="http://schemas.openxmlformats.org/drawingml/2006/main"/>
+          <a:bodyPr/>
+          <a:lstStyle/>
+          <a:p/>
         </p:txBody>
       </p:sp>
     </p:spTree>
   </p:cSld>
   <p:clrMapOvr>
-    <a:masterClrMapping xmlns:a="http://schemas.openxmlformats.org/drawingml/2006/main"/>
+    <a:masterClrMapping/>
   </p:clrMapOvr>
 </p:notes>
 </file>
@@ -794,7 +794,7 @@
   </p:cSld>
   <p:clrMap bg1="lt1" tx1="dk1" bg2="lt2" tx2="dk2" accent1="accent1" accent2="accent2" accent3="accent3" accent4="accent4" accent5="accent5" accent6="accent6" hlink="hlink" folHlink="folHlink"/>
   <p:sldLayoutIdLst>
-    <p:sldLayoutId xmlns:r="http://schemas.openxmlformats.org/officeDocument/2006/relationships" id="2147483649" r:id="R97ecfa09b49f464c"/>
+    <p:sldLayoutId xmlns:r="http://schemas.openxmlformats.org/officeDocument/2006/relationships" id="2147483649" r:id="R0cc174be735c4d92"/>
   </p:sldLayoutIdLst>
   <p:txStyles>
     <p:titleStyle>
@@ -1404,6 +1404,7 @@
           <a:lstStyle xmlns:a="http://schemas.openxmlformats.org/drawingml/2006/main"/>
           <a:p xmlns:a="http://schemas.openxmlformats.org/drawingml/2006/main">
             <a:pPr>
+              <a:buNone/>
               <a:defRPr sz="3000" b="1">
                 <a:solidFill>
                   <a:srgbClr val="142B38"/>
@@ -1461,6 +1462,7 @@
           <a:lstStyle xmlns:a="http://schemas.openxmlformats.org/drawingml/2006/main"/>
           <a:p xmlns:a="http://schemas.openxmlformats.org/drawingml/2006/main">
             <a:pPr>
+              <a:buNone/>
               <a:defRPr sz="4050" b="1">
                 <a:solidFill>
                   <a:srgbClr val="142B38"/>
@@ -1518,6 +1520,7 @@
           <a:lstStyle xmlns:a="http://schemas.openxmlformats.org/drawingml/2006/main"/>
           <a:p xmlns:a="http://schemas.openxmlformats.org/drawingml/2006/main">
             <a:pPr>
+              <a:buNone/>
               <a:defRPr sz="1800" b="0">
                 <a:solidFill>
                   <a:srgbClr val="506673"/>
@@ -1605,6 +1608,7 @@
           <a:lstStyle xmlns:a="http://schemas.openxmlformats.org/drawingml/2006/main"/>
           <a:p xmlns:a="http://schemas.openxmlformats.org/drawingml/2006/main">
             <a:pPr>
+              <a:buNone/>
               <a:defRPr sz="1950" b="1">
                 <a:solidFill>
                   <a:srgbClr val="047A78"/>
@@ -1662,6 +1666,7 @@
           <a:lstStyle xmlns:a="http://schemas.openxmlformats.org/drawingml/2006/main"/>
           <a:p xmlns:a="http://schemas.openxmlformats.org/drawingml/2006/main">
             <a:pPr>
+              <a:buNone/>
               <a:defRPr sz="2325" b="0">
                 <a:solidFill>
                   <a:srgbClr val="142B38"/>
@@ -1719,6 +1724,7 @@
           <a:lstStyle xmlns:a="http://schemas.openxmlformats.org/drawingml/2006/main"/>
           <a:p xmlns:a="http://schemas.openxmlformats.org/drawingml/2006/main">
             <a:pPr>
+              <a:buNone/>
               <a:defRPr sz="1950" b="1">
                 <a:solidFill>
                   <a:srgbClr val="047A78"/>
@@ -1776,6 +1782,7 @@
           <a:lstStyle xmlns:a="http://schemas.openxmlformats.org/drawingml/2006/main"/>
           <a:p xmlns:a="http://schemas.openxmlformats.org/drawingml/2006/main">
             <a:pPr>
+              <a:buNone/>
               <a:defRPr sz="2325" b="0">
                 <a:solidFill>
                   <a:srgbClr val="142B38"/>
@@ -1892,6 +1899,7 @@
           <a:lstStyle xmlns:a="http://schemas.openxmlformats.org/drawingml/2006/main"/>
           <a:p xmlns:a="http://schemas.openxmlformats.org/drawingml/2006/main">
             <a:pPr>
+              <a:buNone/>
               <a:defRPr sz="3000" b="1">
                 <a:solidFill>
                   <a:srgbClr val="142B38"/>
@@ -1949,6 +1957,7 @@
           <a:lstStyle xmlns:a="http://schemas.openxmlformats.org/drawingml/2006/main"/>
           <a:p xmlns:a="http://schemas.openxmlformats.org/drawingml/2006/main">
             <a:pPr>
+              <a:buNone/>
               <a:defRPr sz="1800" b="1">
                 <a:solidFill>
                   <a:srgbClr val="047A78"/>
@@ -2006,6 +2015,7 @@
           <a:lstStyle xmlns:a="http://schemas.openxmlformats.org/drawingml/2006/main"/>
           <a:p xmlns:a="http://schemas.openxmlformats.org/drawingml/2006/main">
             <a:pPr>
+              <a:buNone/>
               <a:defRPr sz="1800" b="1">
                 <a:solidFill>
                   <a:srgbClr val="047A78"/>
@@ -2063,6 +2073,7 @@
           <a:lstStyle xmlns:a="http://schemas.openxmlformats.org/drawingml/2006/main"/>
           <a:p xmlns:a="http://schemas.openxmlformats.org/drawingml/2006/main">
             <a:pPr>
+              <a:buNone/>
               <a:defRPr sz="1800" b="1">
                 <a:solidFill>
                   <a:srgbClr val="047A78"/>
@@ -2150,6 +2161,7 @@
           <a:lstStyle xmlns:a="http://schemas.openxmlformats.org/drawingml/2006/main"/>
           <a:p xmlns:a="http://schemas.openxmlformats.org/drawingml/2006/main">
             <a:pPr>
+              <a:buNone/>
               <a:defRPr sz="1950" b="1">
                 <a:solidFill>
                   <a:srgbClr val="142B38"/>
@@ -2207,6 +2219,7 @@
           <a:lstStyle xmlns:a="http://schemas.openxmlformats.org/drawingml/2006/main"/>
           <a:p xmlns:a="http://schemas.openxmlformats.org/drawingml/2006/main">
             <a:pPr>
+              <a:buNone/>
               <a:defRPr sz="1950" b="0">
                 <a:solidFill>
                   <a:srgbClr val="142B38"/>
@@ -2264,6 +2277,7 @@
           <a:lstStyle xmlns:a="http://schemas.openxmlformats.org/drawingml/2006/main"/>
           <a:p xmlns:a="http://schemas.openxmlformats.org/drawingml/2006/main">
             <a:pPr>
+              <a:buNone/>
               <a:defRPr sz="1950" b="0">
                 <a:solidFill>
                   <a:srgbClr val="142B38"/>
@@ -2351,6 +2365,7 @@
           <a:lstStyle xmlns:a="http://schemas.openxmlformats.org/drawingml/2006/main"/>
           <a:p xmlns:a="http://schemas.openxmlformats.org/drawingml/2006/main">
             <a:pPr>
+              <a:buNone/>
               <a:defRPr sz="1950" b="1">
                 <a:solidFill>
                   <a:srgbClr val="142B38"/>
@@ -2408,6 +2423,7 @@
           <a:lstStyle xmlns:a="http://schemas.openxmlformats.org/drawingml/2006/main"/>
           <a:p xmlns:a="http://schemas.openxmlformats.org/drawingml/2006/main">
             <a:pPr>
+              <a:buNone/>
               <a:defRPr sz="1950" b="0">
                 <a:solidFill>
                   <a:srgbClr val="142B38"/>
@@ -2465,6 +2481,7 @@
           <a:lstStyle xmlns:a="http://schemas.openxmlformats.org/drawingml/2006/main"/>
           <a:p xmlns:a="http://schemas.openxmlformats.org/drawingml/2006/main">
             <a:pPr>
+              <a:buNone/>
               <a:defRPr sz="1950" b="0">
                 <a:solidFill>
                   <a:srgbClr val="142B38"/>
@@ -2552,6 +2569,7 @@
           <a:lstStyle xmlns:a="http://schemas.openxmlformats.org/drawingml/2006/main"/>
           <a:p xmlns:a="http://schemas.openxmlformats.org/drawingml/2006/main">
             <a:pPr>
+              <a:buNone/>
               <a:defRPr sz="1950" b="1">
                 <a:solidFill>
                   <a:srgbClr val="142B38"/>
@@ -2609,6 +2627,7 @@
           <a:lstStyle xmlns:a="http://schemas.openxmlformats.org/drawingml/2006/main"/>
           <a:p xmlns:a="http://schemas.openxmlformats.org/drawingml/2006/main">
             <a:pPr>
+              <a:buNone/>
               <a:defRPr sz="1950" b="0">
                 <a:solidFill>
                   <a:srgbClr val="142B38"/>
@@ -2666,6 +2685,7 @@
           <a:lstStyle xmlns:a="http://schemas.openxmlformats.org/drawingml/2006/main"/>
           <a:p xmlns:a="http://schemas.openxmlformats.org/drawingml/2006/main">
             <a:pPr>
+              <a:buNone/>
               <a:defRPr sz="1950" b="0">
                 <a:solidFill>
                   <a:srgbClr val="142B38"/>
@@ -2723,6 +2743,7 @@
           <a:lstStyle xmlns:a="http://schemas.openxmlformats.org/drawingml/2006/main"/>
           <a:p xmlns:a="http://schemas.openxmlformats.org/drawingml/2006/main">
             <a:pPr>
+              <a:buNone/>
               <a:defRPr sz="1725" b="0">
                 <a:solidFill>
                   <a:srgbClr val="506673"/>
@@ -2839,6 +2860,7 @@
           <a:lstStyle xmlns:a="http://schemas.openxmlformats.org/drawingml/2006/main"/>
           <a:p xmlns:a="http://schemas.openxmlformats.org/drawingml/2006/main">
             <a:pPr>
+              <a:buNone/>
               <a:defRPr sz="3000" b="1">
                 <a:solidFill>
                   <a:srgbClr val="142B38"/>
@@ -2896,6 +2918,7 @@
           <a:lstStyle xmlns:a="http://schemas.openxmlformats.org/drawingml/2006/main"/>
           <a:p xmlns:a="http://schemas.openxmlformats.org/drawingml/2006/main">
             <a:pPr>
+              <a:buNone/>
               <a:defRPr sz="2025" b="1">
                 <a:solidFill>
                   <a:srgbClr val="047A78"/>
@@ -2953,6 +2976,7 @@
           <a:lstStyle xmlns:a="http://schemas.openxmlformats.org/drawingml/2006/main"/>
           <a:p xmlns:a="http://schemas.openxmlformats.org/drawingml/2006/main">
             <a:pPr>
+              <a:buNone/>
               <a:defRPr sz="2025" b="1">
                 <a:solidFill>
                   <a:srgbClr val="142B38"/>
@@ -3010,6 +3034,7 @@
           <a:lstStyle xmlns:a="http://schemas.openxmlformats.org/drawingml/2006/main"/>
           <a:p xmlns:a="http://schemas.openxmlformats.org/drawingml/2006/main">
             <a:pPr>
+              <a:buNone/>
               <a:defRPr sz="1650" b="0">
                 <a:solidFill>
                   <a:srgbClr val="506673"/>
@@ -3067,6 +3092,7 @@
           <a:lstStyle xmlns:a="http://schemas.openxmlformats.org/drawingml/2006/main"/>
           <a:p xmlns:a="http://schemas.openxmlformats.org/drawingml/2006/main">
             <a:pPr>
+              <a:buNone/>
               <a:defRPr sz="2025" b="1">
                 <a:solidFill>
                   <a:srgbClr val="047A78"/>
@@ -3124,6 +3150,7 @@
           <a:lstStyle xmlns:a="http://schemas.openxmlformats.org/drawingml/2006/main"/>
           <a:p xmlns:a="http://schemas.openxmlformats.org/drawingml/2006/main">
             <a:pPr>
+              <a:buNone/>
               <a:defRPr sz="2025" b="1">
                 <a:solidFill>
                   <a:srgbClr val="142B38"/>
@@ -3181,6 +3208,7 @@
           <a:lstStyle xmlns:a="http://schemas.openxmlformats.org/drawingml/2006/main"/>
           <a:p xmlns:a="http://schemas.openxmlformats.org/drawingml/2006/main">
             <a:pPr>
+              <a:buNone/>
               <a:defRPr sz="1650" b="0">
                 <a:solidFill>
                   <a:srgbClr val="506673"/>
@@ -3238,6 +3266,7 @@
           <a:lstStyle xmlns:a="http://schemas.openxmlformats.org/drawingml/2006/main"/>
           <a:p xmlns:a="http://schemas.openxmlformats.org/drawingml/2006/main">
             <a:pPr>
+              <a:buNone/>
               <a:defRPr sz="2025" b="1">
                 <a:solidFill>
                   <a:srgbClr val="047A78"/>
@@ -3295,6 +3324,7 @@
           <a:lstStyle xmlns:a="http://schemas.openxmlformats.org/drawingml/2006/main"/>
           <a:p xmlns:a="http://schemas.openxmlformats.org/drawingml/2006/main">
             <a:pPr>
+              <a:buNone/>
               <a:defRPr sz="2025" b="1">
                 <a:solidFill>
                   <a:srgbClr val="142B38"/>
@@ -3352,6 +3382,7 @@
           <a:lstStyle xmlns:a="http://schemas.openxmlformats.org/drawingml/2006/main"/>
           <a:p xmlns:a="http://schemas.openxmlformats.org/drawingml/2006/main">
             <a:pPr>
+              <a:buNone/>
               <a:defRPr sz="1650" b="0">
                 <a:solidFill>
                   <a:srgbClr val="506673"/>
@@ -3439,6 +3470,7 @@
           <a:lstStyle xmlns:a="http://schemas.openxmlformats.org/drawingml/2006/main"/>
           <a:p xmlns:a="http://schemas.openxmlformats.org/drawingml/2006/main">
             <a:pPr>
+              <a:buNone/>
               <a:defRPr sz="2025" b="1">
                 <a:solidFill>
                   <a:srgbClr val="047A78"/>
@@ -3496,6 +3528,7 @@
           <a:lstStyle xmlns:a="http://schemas.openxmlformats.org/drawingml/2006/main"/>
           <a:p xmlns:a="http://schemas.openxmlformats.org/drawingml/2006/main">
             <a:pPr>
+              <a:buNone/>
               <a:defRPr sz="2025" b="1">
                 <a:solidFill>
                   <a:srgbClr val="142B38"/>
@@ -3553,6 +3586,7 @@
           <a:lstStyle xmlns:a="http://schemas.openxmlformats.org/drawingml/2006/main"/>
           <a:p xmlns:a="http://schemas.openxmlformats.org/drawingml/2006/main">
             <a:pPr>
+              <a:buNone/>
               <a:defRPr sz="1650" b="0">
                 <a:solidFill>
                   <a:srgbClr val="506673"/>
@@ -3610,6 +3644,7 @@
           <a:lstStyle xmlns:a="http://schemas.openxmlformats.org/drawingml/2006/main"/>
           <a:p xmlns:a="http://schemas.openxmlformats.org/drawingml/2006/main">
             <a:pPr>
+              <a:buNone/>
               <a:defRPr sz="2025" b="1">
                 <a:solidFill>
                   <a:srgbClr val="047A78"/>
@@ -3667,6 +3702,7 @@
           <a:lstStyle xmlns:a="http://schemas.openxmlformats.org/drawingml/2006/main"/>
           <a:p xmlns:a="http://schemas.openxmlformats.org/drawingml/2006/main">
             <a:pPr>
+              <a:buNone/>
               <a:defRPr sz="2025" b="1">
                 <a:solidFill>
                   <a:srgbClr val="142B38"/>
@@ -3724,6 +3760,7 @@
           <a:lstStyle xmlns:a="http://schemas.openxmlformats.org/drawingml/2006/main"/>
           <a:p xmlns:a="http://schemas.openxmlformats.org/drawingml/2006/main">
             <a:pPr>
+              <a:buNone/>
               <a:defRPr sz="1650" b="0">
                 <a:solidFill>
                   <a:srgbClr val="506673"/>
@@ -3781,6 +3818,7 @@
           <a:lstStyle xmlns:a="http://schemas.openxmlformats.org/drawingml/2006/main"/>
           <a:p xmlns:a="http://schemas.openxmlformats.org/drawingml/2006/main">
             <a:pPr>
+              <a:buNone/>
               <a:defRPr sz="2025" b="1">
                 <a:solidFill>
                   <a:srgbClr val="047A78"/>
@@ -3838,6 +3876,7 @@
           <a:lstStyle xmlns:a="http://schemas.openxmlformats.org/drawingml/2006/main"/>
           <a:p xmlns:a="http://schemas.openxmlformats.org/drawingml/2006/main">
             <a:pPr>
+              <a:buNone/>
               <a:defRPr sz="2025" b="1">
                 <a:solidFill>
                   <a:srgbClr val="142B38"/>
@@ -3895,6 +3934,7 @@
           <a:lstStyle xmlns:a="http://schemas.openxmlformats.org/drawingml/2006/main"/>
           <a:p xmlns:a="http://schemas.openxmlformats.org/drawingml/2006/main">
             <a:pPr>
+              <a:buNone/>
               <a:defRPr sz="1650" b="0">
                 <a:solidFill>
                   <a:srgbClr val="506673"/>
@@ -3952,6 +3992,7 @@
           <a:lstStyle xmlns:a="http://schemas.openxmlformats.org/drawingml/2006/main"/>
           <a:p xmlns:a="http://schemas.openxmlformats.org/drawingml/2006/main">
             <a:pPr>
+              <a:buNone/>
               <a:defRPr sz="1950" b="1">
                 <a:solidFill>
                   <a:srgbClr val="047A78"/>
@@ -4068,6 +4109,7 @@
           <a:lstStyle xmlns:a="http://schemas.openxmlformats.org/drawingml/2006/main"/>
           <a:p xmlns:a="http://schemas.openxmlformats.org/drawingml/2006/main">
             <a:pPr>
+              <a:buNone/>
               <a:defRPr sz="3000" b="1">
                 <a:solidFill>
                   <a:srgbClr val="142B38"/>
@@ -4125,6 +4167,7 @@
           <a:lstStyle xmlns:a="http://schemas.openxmlformats.org/drawingml/2006/main"/>
           <a:p xmlns:a="http://schemas.openxmlformats.org/drawingml/2006/main">
             <a:pPr>
+              <a:buNone/>
               <a:defRPr sz="2100" b="1">
                 <a:solidFill>
                   <a:srgbClr val="047A78"/>
@@ -4182,6 +4225,7 @@
           <a:lstStyle xmlns:a="http://schemas.openxmlformats.org/drawingml/2006/main"/>
           <a:p xmlns:a="http://schemas.openxmlformats.org/drawingml/2006/main">
             <a:pPr>
+              <a:buNone/>
               <a:defRPr sz="2025" b="0">
                 <a:solidFill>
                   <a:srgbClr val="142B38"/>
@@ -4239,6 +4283,7 @@
           <a:lstStyle xmlns:a="http://schemas.openxmlformats.org/drawingml/2006/main"/>
           <a:p xmlns:a="http://schemas.openxmlformats.org/drawingml/2006/main">
             <a:pPr>
+              <a:buNone/>
               <a:defRPr sz="2100" b="1">
                 <a:solidFill>
                   <a:srgbClr val="047A78"/>
@@ -4296,6 +4341,7 @@
           <a:lstStyle xmlns:a="http://schemas.openxmlformats.org/drawingml/2006/main"/>
           <a:p xmlns:a="http://schemas.openxmlformats.org/drawingml/2006/main">
             <a:pPr>
+              <a:buNone/>
               <a:defRPr sz="2025" b="0">
                 <a:solidFill>
                   <a:srgbClr val="142B38"/>
@@ -4353,6 +4399,7 @@
           <a:lstStyle xmlns:a="http://schemas.openxmlformats.org/drawingml/2006/main"/>
           <a:p xmlns:a="http://schemas.openxmlformats.org/drawingml/2006/main">
             <a:pPr>
+              <a:buNone/>
               <a:defRPr sz="2100" b="1">
                 <a:solidFill>
                   <a:srgbClr val="047A78"/>
@@ -4410,6 +4457,7 @@
           <a:lstStyle xmlns:a="http://schemas.openxmlformats.org/drawingml/2006/main"/>
           <a:p xmlns:a="http://schemas.openxmlformats.org/drawingml/2006/main">
             <a:pPr>
+              <a:buNone/>
               <a:defRPr sz="2025" b="0">
                 <a:solidFill>
                   <a:srgbClr val="142B38"/>
@@ -4497,6 +4545,7 @@
           <a:lstStyle xmlns:a="http://schemas.openxmlformats.org/drawingml/2006/main"/>
           <a:p xmlns:a="http://schemas.openxmlformats.org/drawingml/2006/main">
             <a:pPr>
+              <a:buNone/>
               <a:defRPr sz="1875" b="1">
                 <a:solidFill>
                   <a:srgbClr val="142B38"/>
@@ -4554,6 +4603,7 @@
           <a:lstStyle xmlns:a="http://schemas.openxmlformats.org/drawingml/2006/main"/>
           <a:p xmlns:a="http://schemas.openxmlformats.org/drawingml/2006/main">
             <a:pPr>
+              <a:buNone/>
               <a:defRPr sz="1875" b="0">
                 <a:solidFill>
                   <a:srgbClr val="506673"/>
@@ -4670,6 +4720,7 @@
           <a:lstStyle xmlns:a="http://schemas.openxmlformats.org/drawingml/2006/main"/>
           <a:p xmlns:a="http://schemas.openxmlformats.org/drawingml/2006/main">
             <a:pPr>
+              <a:buNone/>
               <a:defRPr sz="3000" b="1">
                 <a:solidFill>
                   <a:srgbClr val="142B38"/>
@@ -4727,6 +4778,7 @@
           <a:lstStyle xmlns:a="http://schemas.openxmlformats.org/drawingml/2006/main"/>
           <a:p xmlns:a="http://schemas.openxmlformats.org/drawingml/2006/main">
             <a:pPr>
+              <a:buNone/>
               <a:defRPr sz="2100" b="1">
                 <a:solidFill>
                   <a:srgbClr val="047A78"/>
@@ -4784,6 +4836,7 @@
           <a:lstStyle xmlns:a="http://schemas.openxmlformats.org/drawingml/2006/main"/>
           <a:p xmlns:a="http://schemas.openxmlformats.org/drawingml/2006/main">
             <a:pPr>
+              <a:buNone/>
               <a:defRPr sz="2025" b="0">
                 <a:solidFill>
                   <a:srgbClr val="142B38"/>
@@ -4812,6 +4865,7 @@
           </a:p>
           <a:p xmlns:a="http://schemas.openxmlformats.org/drawingml/2006/main">
             <a:pPr>
+              <a:buNone/>
               <a:defRPr sz="2025" b="0">
                 <a:solidFill>
                   <a:srgbClr val="142B38"/>
@@ -4840,6 +4894,7 @@
           </a:p>
           <a:p xmlns:a="http://schemas.openxmlformats.org/drawingml/2006/main">
             <a:pPr>
+              <a:buNone/>
               <a:defRPr sz="2025" b="0">
                 <a:solidFill>
                   <a:srgbClr val="142B38"/>
@@ -4868,6 +4923,7 @@
           </a:p>
           <a:p xmlns:a="http://schemas.openxmlformats.org/drawingml/2006/main">
             <a:pPr>
+              <a:buNone/>
               <a:defRPr sz="2025" b="0">
                 <a:solidFill>
                   <a:srgbClr val="142B38"/>
@@ -4896,6 +4952,7 @@
           </a:p>
           <a:p xmlns:a="http://schemas.openxmlformats.org/drawingml/2006/main">
             <a:pPr>
+              <a:buNone/>
               <a:defRPr sz="2025" b="0">
                 <a:solidFill>
                   <a:srgbClr val="142B38"/>
@@ -4983,6 +5040,7 @@
           <a:lstStyle xmlns:a="http://schemas.openxmlformats.org/drawingml/2006/main"/>
           <a:p xmlns:a="http://schemas.openxmlformats.org/drawingml/2006/main">
             <a:pPr>
+              <a:buNone/>
               <a:defRPr sz="2025" b="1">
                 <a:solidFill>
                   <a:srgbClr val="047A78"/>
@@ -5040,6 +5098,7 @@
           <a:lstStyle xmlns:a="http://schemas.openxmlformats.org/drawingml/2006/main"/>
           <a:p xmlns:a="http://schemas.openxmlformats.org/drawingml/2006/main">
             <a:pPr>
+              <a:buNone/>
               <a:defRPr sz="1950" b="0">
                 <a:solidFill>
                   <a:srgbClr val="142B38"/>
@@ -5058,7 +5117,7 @@
                 <a:ea typeface="Bitstream Charter"/>
                 <a:cs typeface="Bitstream Charter"/>
               </a:rPr>
-              <a:t>Automated application tests cover approval, rejection, citations, persistence, expiry and replay.</a:t>
+              <a:t>27/27 application tests passed using model fixtures.</a:t>
             </a:r>
           </a:p>
           <a:p xmlns:a="http://schemas.openxmlformats.org/drawingml/2006/main">
@@ -5068,6 +5127,7 @@
           </a:p>
           <a:p xmlns:a="http://schemas.openxmlformats.org/drawingml/2006/main">
             <a:pPr>
+              <a:buNone/>
               <a:defRPr sz="1950" b="0">
                 <a:solidFill>
                   <a:srgbClr val="142B38"/>
@@ -5086,7 +5146,55 @@
                 <a:ea typeface="Bitstream Charter"/>
                 <a:cs typeface="Bitstream Charter"/>
               </a:rPr>
-              <a:t>Live model evaluation and final n8n run screenshots must be completed before submission.</a:t>
+              <a:t>10/10 live-model checks passed.</a:t>
+            </a:r>
+          </a:p>
+          <a:p xmlns:a="http://schemas.openxmlformats.org/drawingml/2006/main">
+            <a:pPr>
+              <a:buNone/>
+              <a:defRPr sz="1950" b="0">
+                <a:solidFill>
+                  <a:srgbClr val="142B38"/>
+                </a:solidFill>
+                <a:latin typeface="Bitstream Charter"/>
+                <a:ea typeface="Bitstream Charter"/>
+                <a:cs typeface="Bitstream Charter"/>
+              </a:defRPr>
+            </a:pPr>
+            <a:r>
+              <a:rPr sz="1950" b="0">
+                <a:solidFill>
+                  <a:srgbClr val="142B38"/>
+                </a:solidFill>
+                <a:latin typeface="Bitstream Charter"/>
+                <a:ea typeface="Bitstream Charter"/>
+                <a:cs typeface="Bitstream Charter"/>
+              </a:rPr>
+              <a:t/>
+            </a:r>
+          </a:p>
+          <a:p xmlns:a="http://schemas.openxmlformats.org/drawingml/2006/main">
+            <a:pPr>
+              <a:buNone/>
+              <a:defRPr sz="1950" b="0">
+                <a:solidFill>
+                  <a:srgbClr val="142B38"/>
+                </a:solidFill>
+                <a:latin typeface="Bitstream Charter"/>
+                <a:ea typeface="Bitstream Charter"/>
+                <a:cs typeface="Bitstream Charter"/>
+              </a:defRPr>
+            </a:pPr>
+            <a:r>
+              <a:rPr sz="1950" b="0">
+                <a:solidFill>
+                  <a:srgbClr val="142B38"/>
+                </a:solidFill>
+                <a:latin typeface="Bitstream Charter"/>
+                <a:ea typeface="Bitstream Charter"/>
+                <a:cs typeface="Bitstream Charter"/>
+              </a:rPr>
+              <a:t>Live n8n runs show case creation, rejection and insufficient-evidence blocking.</a:t>
             </a:r>
           </a:p>
         </p:txBody>
@@ -5125,6 +5233,7 @@
           <a:lstStyle xmlns:a="http://schemas.openxmlformats.org/drawingml/2006/main"/>
           <a:p xmlns:a="http://schemas.openxmlformats.org/drawingml/2006/main">
             <a:pPr>
+              <a:buNone/>
               <a:defRPr sz="1725" b="0">
                 <a:solidFill>
                   <a:srgbClr val="506673"/>
